--- a/QuantumComputing.pptx
+++ b/QuantumComputing.pptx
@@ -150,7 +150,7 @@
   <pc:docChgLst>
     <pc:chgData name="Berglund, Anders, Ph.D." userId="5ba1c90d-00f9-4448-8913-03c7b5a152fe" providerId="ADAL" clId="{E6ED17E5-2EDD-52D9-9481-A2103DC77AB0}"/>
     <pc:docChg chg="undo redo custSel addSld delSld modSld sldOrd">
-      <pc:chgData name="Berglund, Anders, Ph.D." userId="5ba1c90d-00f9-4448-8913-03c7b5a152fe" providerId="ADAL" clId="{E6ED17E5-2EDD-52D9-9481-A2103DC77AB0}" dt="2026-01-18T22:27:16.395" v="4530" actId="1076"/>
+      <pc:chgData name="Berglund, Anders, Ph.D." userId="5ba1c90d-00f9-4448-8913-03c7b5a152fe" providerId="ADAL" clId="{E6ED17E5-2EDD-52D9-9481-A2103DC77AB0}" dt="2026-01-19T13:23:55.390" v="4537" actId="20577"/>
       <pc:docMkLst>
         <pc:docMk/>
       </pc:docMkLst>
@@ -399,14 +399,6 @@
             <ac:spMk id="3" creationId="{F607BE4B-C9C8-714F-D3F6-BB3C4DDE7FA2}"/>
           </ac:spMkLst>
         </pc:spChg>
-        <pc:spChg chg="add del mod">
-          <ac:chgData name="Berglund, Anders, Ph.D." userId="5ba1c90d-00f9-4448-8913-03c7b5a152fe" providerId="ADAL" clId="{E6ED17E5-2EDD-52D9-9481-A2103DC77AB0}" dt="2026-01-17T18:56:42.398" v="1373" actId="21"/>
-          <ac:spMkLst>
-            <pc:docMk/>
-            <pc:sldMk cId="1359269626" sldId="266"/>
-            <ac:spMk id="7" creationId="{D6916839-1344-482A-056C-9BF280A9AA9E}"/>
-          </ac:spMkLst>
-        </pc:spChg>
         <pc:spChg chg="add mod">
           <ac:chgData name="Berglund, Anders, Ph.D." userId="5ba1c90d-00f9-4448-8913-03c7b5a152fe" providerId="ADAL" clId="{E6ED17E5-2EDD-52D9-9481-A2103DC77AB0}" dt="2026-01-17T18:56:50.856" v="1375" actId="14100"/>
           <ac:spMkLst>
@@ -453,28 +445,12 @@
             <ac:spMk id="2" creationId="{E4468B33-2105-0822-E938-B8000C5ADDF4}"/>
           </ac:spMkLst>
         </pc:spChg>
-        <pc:spChg chg="del mod">
-          <ac:chgData name="Berglund, Anders, Ph.D." userId="5ba1c90d-00f9-4448-8913-03c7b5a152fe" providerId="ADAL" clId="{E6ED17E5-2EDD-52D9-9481-A2103DC77AB0}" dt="2026-01-17T16:17:32.122" v="837" actId="478"/>
-          <ac:spMkLst>
-            <pc:docMk/>
-            <pc:sldMk cId="722790593" sldId="268"/>
-            <ac:spMk id="3" creationId="{F55EC07E-6CF8-8796-1209-3581CF8D0E51}"/>
-          </ac:spMkLst>
-        </pc:spChg>
         <pc:spChg chg="add mod">
           <ac:chgData name="Berglund, Anders, Ph.D." userId="5ba1c90d-00f9-4448-8913-03c7b5a152fe" providerId="ADAL" clId="{E6ED17E5-2EDD-52D9-9481-A2103DC77AB0}" dt="2026-01-17T16:17:23.443" v="836" actId="1076"/>
           <ac:spMkLst>
             <pc:docMk/>
             <pc:sldMk cId="722790593" sldId="268"/>
             <ac:spMk id="5" creationId="{93554122-A87B-D618-4C1E-64F463CFDFAA}"/>
-          </ac:spMkLst>
-        </pc:spChg>
-        <pc:spChg chg="add del mod">
-          <ac:chgData name="Berglund, Anders, Ph.D." userId="5ba1c90d-00f9-4448-8913-03c7b5a152fe" providerId="ADAL" clId="{E6ED17E5-2EDD-52D9-9481-A2103DC77AB0}" dt="2026-01-17T16:17:34.972" v="838" actId="478"/>
-          <ac:spMkLst>
-            <pc:docMk/>
-            <pc:sldMk cId="722790593" sldId="268"/>
-            <ac:spMk id="7" creationId="{C61BD651-AA75-FAF4-65D0-4E1E894E7EB2}"/>
           </ac:spMkLst>
         </pc:spChg>
         <pc:spChg chg="add mod">
@@ -495,57 +471,17 @@
         </pc:picChg>
       </pc:sldChg>
       <pc:sldChg chg="addSp delSp modSp new mod ord">
-        <pc:chgData name="Berglund, Anders, Ph.D." userId="5ba1c90d-00f9-4448-8913-03c7b5a152fe" providerId="ADAL" clId="{E6ED17E5-2EDD-52D9-9481-A2103DC77AB0}" dt="2026-01-18T16:03:50.548" v="2847" actId="20577"/>
+        <pc:chgData name="Berglund, Anders, Ph.D." userId="5ba1c90d-00f9-4448-8913-03c7b5a152fe" providerId="ADAL" clId="{E6ED17E5-2EDD-52D9-9481-A2103DC77AB0}" dt="2026-01-19T13:21:50.016" v="4531" actId="20577"/>
         <pc:sldMkLst>
           <pc:docMk/>
           <pc:sldMk cId="2763643230" sldId="269"/>
         </pc:sldMkLst>
-        <pc:spChg chg="del mod">
-          <ac:chgData name="Berglund, Anders, Ph.D." userId="5ba1c90d-00f9-4448-8913-03c7b5a152fe" providerId="ADAL" clId="{E6ED17E5-2EDD-52D9-9481-A2103DC77AB0}" dt="2026-01-17T17:03:38.593" v="1207" actId="478"/>
-          <ac:spMkLst>
-            <pc:docMk/>
-            <pc:sldMk cId="2763643230" sldId="269"/>
-            <ac:spMk id="2" creationId="{2EC06004-0516-05E5-F42C-CC1CAC4C2F80}"/>
-          </ac:spMkLst>
-        </pc:spChg>
         <pc:spChg chg="mod">
-          <ac:chgData name="Berglund, Anders, Ph.D." userId="5ba1c90d-00f9-4448-8913-03c7b5a152fe" providerId="ADAL" clId="{E6ED17E5-2EDD-52D9-9481-A2103DC77AB0}" dt="2026-01-18T16:03:50.548" v="2847" actId="20577"/>
+          <ac:chgData name="Berglund, Anders, Ph.D." userId="5ba1c90d-00f9-4448-8913-03c7b5a152fe" providerId="ADAL" clId="{E6ED17E5-2EDD-52D9-9481-A2103DC77AB0}" dt="2026-01-19T13:21:50.016" v="4531" actId="20577"/>
           <ac:spMkLst>
             <pc:docMk/>
             <pc:sldMk cId="2763643230" sldId="269"/>
             <ac:spMk id="3" creationId="{EC957167-ABA1-F20A-C441-7CA2BD994848}"/>
-          </ac:spMkLst>
-        </pc:spChg>
-        <pc:spChg chg="add">
-          <ac:chgData name="Berglund, Anders, Ph.D." userId="5ba1c90d-00f9-4448-8913-03c7b5a152fe" providerId="ADAL" clId="{E6ED17E5-2EDD-52D9-9481-A2103DC77AB0}" dt="2026-01-17T16:38:13.067" v="944"/>
-          <ac:spMkLst>
-            <pc:docMk/>
-            <pc:sldMk cId="2763643230" sldId="269"/>
-            <ac:spMk id="4" creationId="{E782FBC6-EFD4-DE06-9007-34E16C9BA84E}"/>
-          </ac:spMkLst>
-        </pc:spChg>
-        <pc:spChg chg="add">
-          <ac:chgData name="Berglund, Anders, Ph.D." userId="5ba1c90d-00f9-4448-8913-03c7b5a152fe" providerId="ADAL" clId="{E6ED17E5-2EDD-52D9-9481-A2103DC77AB0}" dt="2026-01-17T16:38:13.067" v="944"/>
-          <ac:spMkLst>
-            <pc:docMk/>
-            <pc:sldMk cId="2763643230" sldId="269"/>
-            <ac:spMk id="5" creationId="{9200A47B-C937-2B0B-FCE1-E6D159A59395}"/>
-          </ac:spMkLst>
-        </pc:spChg>
-        <pc:spChg chg="add">
-          <ac:chgData name="Berglund, Anders, Ph.D." userId="5ba1c90d-00f9-4448-8913-03c7b5a152fe" providerId="ADAL" clId="{E6ED17E5-2EDD-52D9-9481-A2103DC77AB0}" dt="2026-01-17T16:38:13.067" v="944"/>
-          <ac:spMkLst>
-            <pc:docMk/>
-            <pc:sldMk cId="2763643230" sldId="269"/>
-            <ac:spMk id="6" creationId="{8DA08058-C38D-624A-DD66-33B4A08E5453}"/>
-          </ac:spMkLst>
-        </pc:spChg>
-        <pc:spChg chg="add del mod">
-          <ac:chgData name="Berglund, Anders, Ph.D." userId="5ba1c90d-00f9-4448-8913-03c7b5a152fe" providerId="ADAL" clId="{E6ED17E5-2EDD-52D9-9481-A2103DC77AB0}" dt="2026-01-17T17:03:40.967" v="1208" actId="478"/>
-          <ac:spMkLst>
-            <pc:docMk/>
-            <pc:sldMk cId="2763643230" sldId="269"/>
-            <ac:spMk id="8" creationId="{D85E3170-9F99-0D92-29D8-DB66622C6FD8}"/>
           </ac:spMkLst>
         </pc:spChg>
         <pc:spChg chg="add mod">
@@ -761,7 +697,7 @@
         </pc:picChg>
       </pc:sldChg>
       <pc:sldChg chg="addSp delSp modSp new mod">
-        <pc:chgData name="Berglund, Anders, Ph.D." userId="5ba1c90d-00f9-4448-8913-03c7b5a152fe" providerId="ADAL" clId="{E6ED17E5-2EDD-52D9-9481-A2103DC77AB0}" dt="2026-01-18T16:09:36.438" v="2857" actId="20577"/>
+        <pc:chgData name="Berglund, Anders, Ph.D." userId="5ba1c90d-00f9-4448-8913-03c7b5a152fe" providerId="ADAL" clId="{E6ED17E5-2EDD-52D9-9481-A2103DC77AB0}" dt="2026-01-19T13:23:55.390" v="4537" actId="20577"/>
         <pc:sldMkLst>
           <pc:docMk/>
           <pc:sldMk cId="3793067668" sldId="275"/>
@@ -815,7 +751,7 @@
           </ac:spMkLst>
         </pc:spChg>
         <pc:spChg chg="add mod">
-          <ac:chgData name="Berglund, Anders, Ph.D." userId="5ba1c90d-00f9-4448-8913-03c7b5a152fe" providerId="ADAL" clId="{E6ED17E5-2EDD-52D9-9481-A2103DC77AB0}" dt="2026-01-18T02:24:30.728" v="2663" actId="1076"/>
+          <ac:chgData name="Berglund, Anders, Ph.D." userId="5ba1c90d-00f9-4448-8913-03c7b5a152fe" providerId="ADAL" clId="{E6ED17E5-2EDD-52D9-9481-A2103DC77AB0}" dt="2026-01-19T13:23:51.808" v="4536" actId="20577"/>
           <ac:spMkLst>
             <pc:docMk/>
             <pc:sldMk cId="3793067668" sldId="275"/>
@@ -823,7 +759,7 @@
           </ac:spMkLst>
         </pc:spChg>
         <pc:spChg chg="add mod">
-          <ac:chgData name="Berglund, Anders, Ph.D." userId="5ba1c90d-00f9-4448-8913-03c7b5a152fe" providerId="ADAL" clId="{E6ED17E5-2EDD-52D9-9481-A2103DC77AB0}" dt="2026-01-18T02:24:18.395" v="2661" actId="1076"/>
+          <ac:chgData name="Berglund, Anders, Ph.D." userId="5ba1c90d-00f9-4448-8913-03c7b5a152fe" providerId="ADAL" clId="{E6ED17E5-2EDD-52D9-9481-A2103DC77AB0}" dt="2026-01-19T13:23:55.390" v="4537" actId="20577"/>
           <ac:spMkLst>
             <pc:docMk/>
             <pc:sldMk cId="3793067668" sldId="275"/>
@@ -1244,7 +1180,7 @@
         </pc:sldMkLst>
       </pc:sldChg>
       <pc:sldChg chg="modSp new mod">
-        <pc:chgData name="Berglund, Anders, Ph.D." userId="5ba1c90d-00f9-4448-8913-03c7b5a152fe" providerId="ADAL" clId="{E6ED17E5-2EDD-52D9-9481-A2103DC77AB0}" dt="2026-01-18T22:17:05.664" v="4447" actId="20577"/>
+        <pc:chgData name="Berglund, Anders, Ph.D." userId="5ba1c90d-00f9-4448-8913-03c7b5a152fe" providerId="ADAL" clId="{E6ED17E5-2EDD-52D9-9481-A2103DC77AB0}" dt="2026-01-19T13:22:11.149" v="4535" actId="20577"/>
         <pc:sldMkLst>
           <pc:docMk/>
           <pc:sldMk cId="758503193" sldId="288"/>
@@ -1258,7 +1194,7 @@
           </ac:spMkLst>
         </pc:spChg>
         <pc:spChg chg="mod">
-          <ac:chgData name="Berglund, Anders, Ph.D." userId="5ba1c90d-00f9-4448-8913-03c7b5a152fe" providerId="ADAL" clId="{E6ED17E5-2EDD-52D9-9481-A2103DC77AB0}" dt="2026-01-18T22:17:05.664" v="4447" actId="20577"/>
+          <ac:chgData name="Berglund, Anders, Ph.D." userId="5ba1c90d-00f9-4448-8913-03c7b5a152fe" providerId="ADAL" clId="{E6ED17E5-2EDD-52D9-9481-A2103DC77AB0}" dt="2026-01-19T13:22:11.149" v="4535" actId="20577"/>
           <ac:spMkLst>
             <pc:docMk/>
             <pc:sldMk cId="758503193" sldId="288"/>
@@ -6893,7 +6829,7 @@
           <a:p>
             <a:fld id="{1D73699E-5244-254A-989E-B2675C6B6A36}" type="datetimeFigureOut">
               <a:rPr lang="en-US" smtClean="0"/>
-              <a:t>1/18/26</a:t>
+              <a:t>1/19/26</a:t>
             </a:fld>
             <a:endParaRPr lang="en-US"/>
           </a:p>
@@ -7091,7 +7027,7 @@
           <a:p>
             <a:fld id="{1D73699E-5244-254A-989E-B2675C6B6A36}" type="datetimeFigureOut">
               <a:rPr lang="en-US" smtClean="0"/>
-              <a:t>1/18/26</a:t>
+              <a:t>1/19/26</a:t>
             </a:fld>
             <a:endParaRPr lang="en-US"/>
           </a:p>
@@ -7299,7 +7235,7 @@
           <a:p>
             <a:fld id="{1D73699E-5244-254A-989E-B2675C6B6A36}" type="datetimeFigureOut">
               <a:rPr lang="en-US" smtClean="0"/>
-              <a:t>1/18/26</a:t>
+              <a:t>1/19/26</a:t>
             </a:fld>
             <a:endParaRPr lang="en-US"/>
           </a:p>
@@ -7497,7 +7433,7 @@
           <a:p>
             <a:fld id="{1D73699E-5244-254A-989E-B2675C6B6A36}" type="datetimeFigureOut">
               <a:rPr lang="en-US" smtClean="0"/>
-              <a:t>1/18/26</a:t>
+              <a:t>1/19/26</a:t>
             </a:fld>
             <a:endParaRPr lang="en-US"/>
           </a:p>
@@ -7772,7 +7708,7 @@
           <a:p>
             <a:fld id="{1D73699E-5244-254A-989E-B2675C6B6A36}" type="datetimeFigureOut">
               <a:rPr lang="en-US" smtClean="0"/>
-              <a:t>1/18/26</a:t>
+              <a:t>1/19/26</a:t>
             </a:fld>
             <a:endParaRPr lang="en-US"/>
           </a:p>
@@ -8037,7 +7973,7 @@
           <a:p>
             <a:fld id="{1D73699E-5244-254A-989E-B2675C6B6A36}" type="datetimeFigureOut">
               <a:rPr lang="en-US" smtClean="0"/>
-              <a:t>1/18/26</a:t>
+              <a:t>1/19/26</a:t>
             </a:fld>
             <a:endParaRPr lang="en-US"/>
           </a:p>
@@ -8449,7 +8385,7 @@
           <a:p>
             <a:fld id="{1D73699E-5244-254A-989E-B2675C6B6A36}" type="datetimeFigureOut">
               <a:rPr lang="en-US" smtClean="0"/>
-              <a:t>1/18/26</a:t>
+              <a:t>1/19/26</a:t>
             </a:fld>
             <a:endParaRPr lang="en-US"/>
           </a:p>
@@ -8590,7 +8526,7 @@
           <a:p>
             <a:fld id="{1D73699E-5244-254A-989E-B2675C6B6A36}" type="datetimeFigureOut">
               <a:rPr lang="en-US" smtClean="0"/>
-              <a:t>1/18/26</a:t>
+              <a:t>1/19/26</a:t>
             </a:fld>
             <a:endParaRPr lang="en-US"/>
           </a:p>
@@ -8703,7 +8639,7 @@
           <a:p>
             <a:fld id="{1D73699E-5244-254A-989E-B2675C6B6A36}" type="datetimeFigureOut">
               <a:rPr lang="en-US" smtClean="0"/>
-              <a:t>1/18/26</a:t>
+              <a:t>1/19/26</a:t>
             </a:fld>
             <a:endParaRPr lang="en-US"/>
           </a:p>
@@ -9014,7 +8950,7 @@
           <a:p>
             <a:fld id="{1D73699E-5244-254A-989E-B2675C6B6A36}" type="datetimeFigureOut">
               <a:rPr lang="en-US" smtClean="0"/>
-              <a:t>1/18/26</a:t>
+              <a:t>1/19/26</a:t>
             </a:fld>
             <a:endParaRPr lang="en-US"/>
           </a:p>
@@ -9302,7 +9238,7 @@
           <a:p>
             <a:fld id="{1D73699E-5244-254A-989E-B2675C6B6A36}" type="datetimeFigureOut">
               <a:rPr lang="en-US" smtClean="0"/>
-              <a:t>1/18/26</a:t>
+              <a:t>1/19/26</a:t>
             </a:fld>
             <a:endParaRPr lang="en-US"/>
           </a:p>
@@ -9543,7 +9479,7 @@
           <a:p>
             <a:fld id="{1D73699E-5244-254A-989E-B2675C6B6A36}" type="datetimeFigureOut">
               <a:rPr lang="en-US" smtClean="0"/>
-              <a:t>1/18/26</a:t>
+              <a:t>1/19/26</a:t>
             </a:fld>
             <a:endParaRPr lang="en-US"/>
           </a:p>
@@ -11734,7 +11670,7 @@
           <a:p>
             <a:r>
               <a:rPr lang="en-US" sz="2400" b="1" dirty="0"/>
-              <a:t>4</a:t>
+              <a:t>3</a:t>
             </a:r>
           </a:p>
         </p:txBody>
@@ -11769,7 +11705,7 @@
           <a:p>
             <a:r>
               <a:rPr lang="en-US" sz="2400" b="1" dirty="0"/>
-              <a:t>3</a:t>
+              <a:t>4</a:t>
             </a:r>
           </a:p>
         </p:txBody>
@@ -13867,15 +13803,7 @@
             <a:pPr lvl="2"/>
             <a:r>
               <a:rPr lang="en-US" dirty="0"/>
-              <a:t>May be a good </a:t>
-            </a:r>
-            <a:r>
-              <a:rPr lang="en-US" dirty="0" err="1"/>
-              <a:t>ise</a:t>
-            </a:r>
-            <a:r>
-              <a:rPr lang="en-US" dirty="0"/>
-              <a:t> for a grant</a:t>
+              <a:t>May be a good idea for a grant</a:t>
             </a:r>
           </a:p>
           <a:p>
@@ -15800,7 +15728,7 @@
                 <a:pPr lvl="1"/>
                 <a:r>
                   <a:rPr lang="en-US" dirty="0"/>
-                  <a:t>Block sphere representation</a:t>
+                  <a:t>Bloch sphere representation</a:t>
                 </a:r>
               </a:p>
               <a:p>
